--- a/system-design-101/vi/lessons/sd-06-022/slides/sd-06-022.pptx
+++ b/system-design-101/vi/lessons/sd-06-022/slides/sd-06-022.pptx
@@ -4840,11 +4840,11 @@
         <p:spPr>
           <a:xfrm>
             <a:off x="914400" y="2857500"/>
-            <a:ext cx="16459200" cy="1905000"/>
+            <a:ext cx="16459200" cy="2190750"/>
           </a:xfrm>
           <a:prstGeom prst="roundRect">
             <a:avLst>
-              <a:gd name="adj" fmla="val 13000"/>
+              <a:gd name="adj" fmla="val 11304"/>
             </a:avLst>
           </a:prstGeom>
           <a:solidFill>
@@ -4977,18 +4977,90 @@
       </p:sp>
       <p:sp>
         <p:nvSpPr>
-          <p:cNvPr id="7" name="Shape 5"/>
-          <p:cNvSpPr/>
-          <p:nvPr/>
-        </p:nvSpPr>
-        <p:spPr>
-          <a:xfrm>
-            <a:off x="914400" y="5048250"/>
-            <a:ext cx="16459200" cy="2476500"/>
+          <p:cNvPr id="7" name="Text 5"/>
+          <p:cNvSpPr/>
+          <p:nvPr/>
+        </p:nvSpPr>
+        <p:spPr>
+          <a:xfrm>
+            <a:off x="1295400" y="4476750"/>
+            <a:ext cx="15716250" cy="476250"/>
+          </a:xfrm>
+          <a:prstGeom prst="rect">
+            <a:avLst/>
+          </a:prstGeom>
+          <a:noFill/>
+          <a:ln/>
+        </p:spPr>
+        <p:txBody>
+          <a:bodyPr wrap="square" lIns="0" tIns="0" rIns="0" bIns="0" rtlCol="0" anchor="ctr"/>
+          <a:lstStyle/>
+          <a:p>
+            <a:pPr algn="l" indent="0" marL="0">
+              <a:buNone/>
+            </a:pPr>
+            <a:r>
+              <a:rPr lang="en-US" sz="2550" dirty="0" spc="-22" kern="0">
+                <a:solidFill>
+                  <a:srgbClr val="F3EEE3"/>
+                </a:solidFill>
+                <a:latin typeface="Be Vietnam Pro" pitchFamily="34" charset="0"/>
+                <a:ea typeface="Be Vietnam Pro" pitchFamily="34" charset="-122"/>
+                <a:cs typeface="Be Vietnam Pro" pitchFamily="34" charset="-120"/>
+              </a:rPr>
+              <a:t>Shard</a:t>
+            </a:r>
+            <a:r>
+              <a:rPr lang="en-US" sz="2550" dirty="0" spc="-18" kern="0">
+                <a:solidFill>
+                  <a:srgbClr val="F3EEE3"/>
+                </a:solidFill>
+                <a:latin typeface="Be Vietnam Pro" pitchFamily="34" charset="0"/>
+                <a:ea typeface="Be Vietnam Pro" pitchFamily="34" charset="-122"/>
+                <a:cs typeface="Be Vietnam Pro" pitchFamily="34" charset="-120"/>
+              </a:rPr>
+              <a:t> và</a:t>
+            </a:r>
+            <a:r>
+              <a:rPr lang="en-US" sz="2550" dirty="0" spc="-3" kern="0">
+                <a:solidFill>
+                  <a:srgbClr val="F3EEE3"/>
+                </a:solidFill>
+                <a:latin typeface="Be Vietnam Pro" pitchFamily="34" charset="0"/>
+                <a:ea typeface="Be Vietnam Pro" pitchFamily="34" charset="-122"/>
+                <a:cs typeface="Be Vietnam Pro" pitchFamily="34" charset="-120"/>
+              </a:rPr>
+              <a:t> bản</a:t>
+            </a:r>
+            <a:r>
+              <a:rPr lang="en-US" sz="2550" dirty="0" spc="-6" kern="0">
+                <a:solidFill>
+                  <a:srgbClr val="F3EEE3"/>
+                </a:solidFill>
+                <a:latin typeface="Be Vietnam Pro" pitchFamily="34" charset="0"/>
+                <a:ea typeface="Be Vietnam Pro" pitchFamily="34" charset="-122"/>
+                <a:cs typeface="Be Vietnam Pro" pitchFamily="34" charset="-120"/>
+              </a:rPr>
+              <a:t> sao.</a:t>
+            </a:r>
+            <a:endParaRPr lang="en-US" sz="2550" dirty="0"/>
+          </a:p>
+        </p:txBody>
+      </p:sp>
+      <p:sp>
+        <p:nvSpPr>
+          <p:cNvPr id="8" name="Shape 6"/>
+          <p:cNvSpPr/>
+          <p:nvPr/>
+        </p:nvSpPr>
+        <p:spPr>
+          <a:xfrm>
+            <a:off x="914400" y="5334000"/>
+            <a:ext cx="16459200" cy="2190750"/>
           </a:xfrm>
           <a:prstGeom prst="roundRect">
             <a:avLst>
-              <a:gd name="adj" fmla="val 10000"/>
+              <a:gd name="adj" fmla="val 11304"/>
             </a:avLst>
           </a:prstGeom>
           <a:solidFill>
@@ -5004,13 +5076,13 @@
       </p:sp>
       <p:sp>
         <p:nvSpPr>
-          <p:cNvPr id="8" name="Text 6"/>
-          <p:cNvSpPr/>
-          <p:nvPr/>
-        </p:nvSpPr>
-        <p:spPr>
-          <a:xfrm>
-            <a:off x="1295400" y="5334000"/>
+          <p:cNvPr id="9" name="Text 7"/>
+          <p:cNvSpPr/>
+          <p:nvPr/>
+        </p:nvSpPr>
+        <p:spPr>
+          <a:xfrm>
+            <a:off x="1295400" y="5619750"/>
             <a:ext cx="15716250" cy="381000"/>
           </a:xfrm>
           <a:prstGeom prst="rect">
@@ -5043,13 +5115,13 @@
       </p:sp>
       <p:sp>
         <p:nvSpPr>
-          <p:cNvPr id="9" name="Text 7"/>
-          <p:cNvSpPr/>
-          <p:nvPr/>
-        </p:nvSpPr>
-        <p:spPr>
-          <a:xfrm>
-            <a:off x="1295400" y="5791200"/>
+          <p:cNvPr id="10" name="Text 8"/>
+          <p:cNvSpPr/>
+          <p:nvPr/>
+        </p:nvSpPr>
+        <p:spPr>
+          <a:xfrm>
+            <a:off x="1295400" y="6076950"/>
             <a:ext cx="15716250" cy="857250"/>
           </a:xfrm>
           <a:prstGeom prst="rect">
@@ -5115,14 +5187,14 @@
       </p:sp>
       <p:sp>
         <p:nvSpPr>
-          <p:cNvPr id="10" name="Text 8"/>
-          <p:cNvSpPr/>
-          <p:nvPr/>
-        </p:nvSpPr>
-        <p:spPr>
-          <a:xfrm>
-            <a:off x="1295400" y="6667500"/>
-            <a:ext cx="15716250" cy="571500"/>
+          <p:cNvPr id="11" name="Text 9"/>
+          <p:cNvSpPr/>
+          <p:nvPr/>
+        </p:nvSpPr>
+        <p:spPr>
+          <a:xfrm>
+            <a:off x="1295400" y="6953250"/>
+            <a:ext cx="15716250" cy="476250"/>
           </a:xfrm>
           <a:prstGeom prst="rect">
             <a:avLst/>
@@ -5212,18 +5284,62 @@
                 <a:ea typeface="Be Vietnam Pro" pitchFamily="34" charset="-122"/>
                 <a:cs typeface="Be Vietnam Pro" pitchFamily="34" charset="-120"/>
               </a:rPr>
-              <a:t> segment,</a:t>
-            </a:r>
-            <a:r>
-              <a:rPr lang="en-US" sz="2550" dirty="0" spc="-15" kern="0">
-                <a:solidFill>
-                  <a:srgbClr val="14161C"/>
-                </a:solidFill>
-                <a:latin typeface="Be Vietnam Pro" pitchFamily="34" charset="0"/>
-                <a:ea typeface="Be Vietnam Pro" pitchFamily="34" charset="-122"/>
-                <a:cs typeface="Be Vietnam Pro" pitchFamily="34" charset="-120"/>
-              </a:rPr>
-              <a:t> shard.</a:t>
+              <a:t> segment;</a:t>
+            </a:r>
+            <a:r>
+              <a:rPr lang="en-US" sz="2550" dirty="0" spc="0" kern="0">
+                <a:solidFill>
+                  <a:srgbClr val="14161C"/>
+                </a:solidFill>
+                <a:latin typeface="Be Vietnam Pro" pitchFamily="34" charset="0"/>
+                <a:ea typeface="Be Vietnam Pro" pitchFamily="34" charset="-122"/>
+                <a:cs typeface="Be Vietnam Pro" pitchFamily="34" charset="-120"/>
+              </a:rPr>
+              <a:t> mỗi</a:t>
+            </a:r>
+            <a:r>
+              <a:rPr lang="en-US" sz="2550" dirty="0" spc="-18" kern="0">
+                <a:solidFill>
+                  <a:srgbClr val="14161C"/>
+                </a:solidFill>
+                <a:latin typeface="Be Vietnam Pro" pitchFamily="34" charset="0"/>
+                <a:ea typeface="Be Vietnam Pro" pitchFamily="34" charset="-122"/>
+                <a:cs typeface="Be Vietnam Pro" pitchFamily="34" charset="-120"/>
+              </a:rPr>
+              <a:t> shard</a:t>
+            </a:r>
+            <a:r>
+              <a:rPr lang="en-US" sz="2550" dirty="0" spc="0" kern="0">
+                <a:solidFill>
+                  <a:srgbClr val="14161C"/>
+                </a:solidFill>
+                <a:latin typeface="Be Vietnam Pro" pitchFamily="34" charset="0"/>
+                <a:ea typeface="Be Vietnam Pro" pitchFamily="34" charset="-122"/>
+                <a:cs typeface="Be Vietnam Pro" pitchFamily="34" charset="-120"/>
+              </a:rPr>
+              <a:t> là</a:t>
+            </a:r>
+            <a:r>
+              <a:rPr lang="en-US" sz="2550" dirty="0" spc="-5" kern="0">
+                <a:solidFill>
+                  <a:srgbClr val="14161C"/>
+                </a:solidFill>
+                <a:latin typeface="Be Vietnam Pro" pitchFamily="34" charset="0"/>
+                <a:ea typeface="Be Vietnam Pro" pitchFamily="34" charset="-122"/>
+                <a:cs typeface="Be Vietnam Pro" pitchFamily="34" charset="-120"/>
+              </a:rPr>
+              <a:t> một</a:t>
+            </a:r>
+            <a:r>
+              <a:rPr lang="en-US" sz="2550" dirty="0" spc="0" kern="0">
+                <a:solidFill>
+                  <a:srgbClr val="14161C"/>
+                </a:solidFill>
+                <a:latin typeface="Be Vietnam Pro" pitchFamily="34" charset="0"/>
+                <a:ea typeface="Be Vietnam Pro" pitchFamily="34" charset="-122"/>
+                <a:cs typeface="Be Vietnam Pro" pitchFamily="34" charset="-120"/>
+              </a:rPr>
+              <a:t> chỉ mục.</a:t>
             </a:r>
             <a:endParaRPr lang="en-US" sz="2550" dirty="0"/>
           </a:p>
@@ -5231,7 +5347,7 @@
       </p:sp>
       <p:sp>
         <p:nvSpPr>
-          <p:cNvPr id="11" name="Text 9"/>
+          <p:cNvPr id="12" name="Text 10"/>
           <p:cNvSpPr/>
           <p:nvPr/>
         </p:nvSpPr>
@@ -5329,7 +5445,7 @@
       </p:sp>
       <p:sp>
         <p:nvSpPr>
-          <p:cNvPr id="12" name="Shape 10"/>
+          <p:cNvPr id="13" name="Shape 11"/>
           <p:cNvSpPr/>
           <p:nvPr/>
         </p:nvSpPr>
@@ -5354,7 +5470,7 @@
       </p:sp>
       <p:sp>
         <p:nvSpPr>
-          <p:cNvPr id="13" name="Shape 11"/>
+          <p:cNvPr id="14" name="Shape 12"/>
           <p:cNvSpPr/>
           <p:nvPr/>
         </p:nvSpPr>
@@ -5379,7 +5495,7 @@
       </p:sp>
       <p:sp>
         <p:nvSpPr>
-          <p:cNvPr id="14" name="Shape 12"/>
+          <p:cNvPr id="15" name="Shape 13"/>
           <p:cNvSpPr/>
           <p:nvPr/>
         </p:nvSpPr>
@@ -5404,7 +5520,7 @@
       </p:sp>
       <p:sp>
         <p:nvSpPr>
-          <p:cNvPr id="15" name="Shape 13"/>
+          <p:cNvPr id="16" name="Shape 14"/>
           <p:cNvSpPr/>
           <p:nvPr/>
         </p:nvSpPr>
@@ -5429,7 +5545,7 @@
       </p:sp>
       <p:sp>
         <p:nvSpPr>
-          <p:cNvPr id="16" name="Shape 14"/>
+          <p:cNvPr id="17" name="Shape 15"/>
           <p:cNvSpPr/>
           <p:nvPr/>
         </p:nvSpPr>
@@ -5454,7 +5570,7 @@
       </p:sp>
       <p:sp>
         <p:nvSpPr>
-          <p:cNvPr id="17" name="Shape 15"/>
+          <p:cNvPr id="18" name="Shape 16"/>
           <p:cNvSpPr/>
           <p:nvPr/>
         </p:nvSpPr>
@@ -5479,7 +5595,7 @@
       </p:sp>
       <p:sp>
         <p:nvSpPr>
-          <p:cNvPr id="18" name="Shape 16"/>
+          <p:cNvPr id="19" name="Shape 17"/>
           <p:cNvSpPr/>
           <p:nvPr/>
         </p:nvSpPr>
@@ -5504,7 +5620,7 @@
       </p:sp>
       <p:sp>
         <p:nvSpPr>
-          <p:cNvPr id="19" name="Shape 17"/>
+          <p:cNvPr id="20" name="Shape 18"/>
           <p:cNvSpPr/>
           <p:nvPr/>
         </p:nvSpPr>
@@ -5529,7 +5645,7 @@
       </p:sp>
       <p:sp>
         <p:nvSpPr>
-          <p:cNvPr id="20" name="Shape 18"/>
+          <p:cNvPr id="21" name="Shape 19"/>
           <p:cNvSpPr/>
           <p:nvPr/>
         </p:nvSpPr>
@@ -5554,7 +5670,7 @@
       </p:sp>
       <p:sp>
         <p:nvSpPr>
-          <p:cNvPr id="21" name="Shape 19"/>
+          <p:cNvPr id="22" name="Shape 20"/>
           <p:cNvSpPr/>
           <p:nvPr/>
         </p:nvSpPr>
@@ -5579,7 +5695,7 @@
       </p:sp>
       <p:sp>
         <p:nvSpPr>
-          <p:cNvPr id="22" name="Text 20"/>
+          <p:cNvPr id="23" name="Text 21"/>
           <p:cNvSpPr/>
           <p:nvPr/>
         </p:nvSpPr>
@@ -5684,7 +5800,7 @@
       </p:sp>
       <p:sp>
         <p:nvSpPr>
-          <p:cNvPr id="23" name="Shape 21"/>
+          <p:cNvPr id="24" name="Shape 22"/>
           <p:cNvSpPr/>
           <p:nvPr/>
         </p:nvSpPr>
@@ -5708,7 +5824,7 @@
       </p:sp>
       <p:pic>
         <p:nvPicPr>
-          <p:cNvPr id="24" name="Moda image moda-export-watermark-2bb59995-f98d-4f25-a0af-e128f17be5e0" descr="">    </p:cNvPr>
+          <p:cNvPr id="25" name="Moda image moda-export-watermark-2bb59995-f98d-4f25-a0af-e128f17be5e0" descr="">    </p:cNvPr>
           <p:cNvPicPr>
             <a:picLocks noChangeAspect="1"/>
           </p:cNvPicPr>
